--- a/deliverables/KARNADHAR_Deck.pptx
+++ b/deliverables/KARNADHAR_Deck.pptx
@@ -602,7 +602,7 @@
           <a:p>
             <a:r>
               <a:rPr lang="en-US" dirty="0"/>
-              <a:t>This is the product. Next.js and MapLibre over a FastAPI engine. The map you see is live — the red routes are the Gulf corridors dying when Hormuz closes; the green ones are the alternates KARNADHAR is re-routing through. Click a scenario and the entire national plan recomputes in 45 milliseconds. This screenshot shows the Russia-sanction scenario — one cut artery, and the map tells you instantly what changed.</a:t>
+              <a:t>This is the product. Next.js and MapLibre over a FastAPI engine. The globe is live — the red routes are the Gulf corridors dying when Hormuz closes; the green ones are the alternates KARNADHAR is re-routing through. Click a scenario and the entire national plan re-solves in tens of milliseconds, measured live in-app. And under every scenario sits the decision layer: the LP’s shadow prices naming the scarcest barrel, the usable-shortfall honesty metric, and the tanker cost of longer voyages.</a:t>
             </a:r>
             <a:endParaRPr lang="en-US" dirty="0"/>
           </a:p>
@@ -690,7 +690,7 @@
           <a:p>
             <a:r>
               <a:rPr lang="en-US" dirty="0"/>
-              <a:t>Three layers of trust. A validation suite — 35 assertions about the engine’s behaviour, all green, runnable in one command. Full coverage of the brief’s five evaluation-focus criteria. And two independent domain experts — a Distinguished Fellow at ORF for the economics, and a PDEU petroleum professor for the refining science — reviewed our assumptions.</a:t>
+              <a:t>Three layers of trust. A validation suite — 45 falsifiable assertions about the engine’s behaviour, all green, one command, and run automatically in CI on every push to the public repo. Full coverage of the brief’s five evaluation-focus criteria. And two independent domain experts — a Distinguished Fellow at ORF for the economics, and a PDEU petroleum professor for the refining science — reviewed our assumptions.</a:t>
             </a:r>
             <a:endParaRPr lang="en-US" dirty="0"/>
           </a:p>
@@ -1306,7 +1306,7 @@
           <a:p>
             <a:r>
               <a:rPr lang="en-US" dirty="0"/>
-              <a:t>We ran the same crisis through two planners. The naive planner — price-rational, supply-respecting, but grade-blind — produces a plan where 250,000 barrels a day go to refineries that cannot process them. It is infeasible for a grade reason, which is exactly our thesis. KARNADHAR’s linear program produces a fully feasible plan and protects over 3 million dollars a day of product yield — over a billion dollars a year.</a:t>
+              <a:t>We ran the same crisis through two planners. The naive planner — price-rational, supply-respecting, but grade-blind — produces a plan where 250,000 barrels a day go to refineries that cannot process them. It is infeasible for a grade reason, which is exactly our thesis. KARNADHAR’s linear program produces a fully feasible plan and protects over 3 million dollars a day of product yield — over a billion dollars a year. And the same failure mode reproduces on the real customs-data model — different numbers, same physics, which is the point.</a:t>
             </a:r>
             <a:endParaRPr lang="en-US" dirty="0"/>
           </a:p>
@@ -1570,7 +1570,7 @@
           <a:p>
             <a:r>
               <a:rPr lang="en-US" dirty="0"/>
-              <a:t>The engine generalizes. Any chokepoint, any supplier sanction, any combination. And critically — it’s honest. Add an OPEC squeeze on top of Hormuz and even the optimal reroute leaves 32,000 barrels a day unmet. The engine says so, quantified. That honesty is what makes it usable for policy.</a:t>
+              <a:t>The engine generalizes — any chokepoint, any supplier sanction, any combination, all on the real customs-data model. Notice two things no dashboard gives you. First, honesty: in the compound shock the naive plan pretends to fill the gap with 546,000 barrels a day of crude the refineries cannot run; we count only usable barrels and state the true shortfall — 2,166. Second, the decision layer: the optimizer prices the reroute in tankers — plus 66 VLCC-equivalents — and its shadow prices name the scarcest barrel. That is what makes it usable for policy.</a:t>
             </a:r>
             <a:endParaRPr lang="en-US" dirty="0"/>
           </a:p>
@@ -2837,7 +2837,7 @@
                 <a:ea typeface="Arial" pitchFamily="34" charset="-122"/>
                 <a:cs typeface="Arial" pitchFamily="34" charset="-120"/>
               </a:rPr>
-              <a:t>45 ms
+              <a:t>Decision layer
 </a:t>
             </a:r>
             <a:pPr indent="0" marL="0">
@@ -2855,7 +2855,7 @@
                 <a:ea typeface="Arial" pitchFamily="34" charset="-122"/>
                 <a:cs typeface="Arial" pitchFamily="34" charset="-120"/>
               </a:rPr>
-              <a:t>scenario click → new national plan on screen</a:t>
+              <a:t>LP shadow prices, usable shortfall, VLCC ton-mile cost — live on every scenario</a:t>
             </a:r>
             <a:endParaRPr lang="en-US" sz="1350" dirty="0"/>
           </a:p>
@@ -3070,7 +3070,7 @@
                 <a:ea typeface="Arial" pitchFamily="34" charset="-122"/>
                 <a:cs typeface="Arial" pitchFamily="34" charset="-120"/>
               </a:rPr>
-              <a:t>39 / 39</a:t>
+              <a:t>45 / 45</a:t>
             </a:r>
             <a:endParaRPr lang="en-US" sz="4400" dirty="0"/>
           </a:p>
@@ -3109,7 +3109,7 @@
                 <a:ea typeface="Arial" pitchFamily="34" charset="-122"/>
                 <a:cs typeface="Arial" pitchFamily="34" charset="-120"/>
               </a:rPr>
-              <a:t>checks passed — one command, exit-code gated</a:t>
+              <a:t>checks passed — one command, exit-code gated, run in CI on every push</a:t>
             </a:r>
             <a:endParaRPr lang="en-US" sz="1200" dirty="0"/>
           </a:p>
@@ -3237,6 +3237,27 @@
                 <a:cs typeface="Arial" pitchFamily="34" charset="-120"/>
               </a:rPr>
               <a:t>engine admits unmet demand under compound shocks</a:t>
+            </a:r>
+            <a:endParaRPr lang="en-US" sz="1250" dirty="0"/>
+          </a:p>
+          <a:p>
+            <a:pPr marL="342900" indent="-342900">
+              <a:spcAft>
+                <a:spcPts val="800"/>
+              </a:spcAft>
+              <a:buSzPct val="100000"/>
+              <a:buChar char="✓"/>
+            </a:pPr>
+            <a:r>
+              <a:rPr lang="en-US" sz="1250" dirty="0">
+                <a:solidFill>
+                  <a:srgbClr val="93A0B0"/>
+                </a:solidFill>
+                <a:latin typeface="Arial" pitchFamily="34" charset="0"/>
+                <a:ea typeface="Arial" pitchFamily="34" charset="-122"/>
+                <a:cs typeface="Arial" pitchFamily="34" charset="-120"/>
+              </a:rPr>
+              <a:t>decision layer proven: shadow prices · VLCC ton-mile · usable shortfall</a:t>
             </a:r>
             <a:endParaRPr lang="en-US" sz="1250" dirty="0"/>
           </a:p>
@@ -11203,6 +11224,45 @@
           </a:p>
         </p:txBody>
       </p:sp>
+      <p:sp>
+        <p:nvSpPr>
+          <p:cNvPr id="21" name="Text 19"/>
+          <p:cNvSpPr/>
+          <p:nvPr/>
+        </p:nvSpPr>
+        <p:spPr>
+          <a:xfrm>
+            <a:off x="548640" y="6419088"/>
+            <a:ext cx="11064240" cy="274320"/>
+          </a:xfrm>
+          <a:prstGeom prst="rect">
+            <a:avLst/>
+          </a:prstGeom>
+          <a:noFill/>
+          <a:ln/>
+        </p:spPr>
+        <p:txBody>
+          <a:bodyPr wrap="square" lIns="0" tIns="0" rIns="0" bIns="0" rtlCol="0" anchor="ctr"/>
+          <a:lstStyle/>
+          <a:p>
+            <a:pPr indent="0" marL="0">
+              <a:buNone/>
+            </a:pPr>
+            <a:r>
+              <a:rPr lang="en-US" sz="950" dirty="0">
+                <a:solidFill>
+                  <a:srgbClr val="5A6472"/>
+                </a:solidFill>
+                <a:latin typeface="Arial" pitchFamily="34" charset="0"/>
+                <a:ea typeface="Arial" pitchFamily="34" charset="-122"/>
+                <a:cs typeface="Arial" pitchFamily="34" charset="-120"/>
+              </a:rPr>
+              <a:t>Curated stress-demo (15 grades × 7 refineries, public assays) — the wedge REPRODUCES on the real DGCIS model: sulphur-blend breach at Vizag; 220 kb/d un-runnable under sanctions (next slides)</a:t>
+            </a:r>
+            <a:endParaRPr lang="en-US" sz="950" dirty="0"/>
+          </a:p>
+        </p:txBody>
+      </p:sp>
     </p:spTree>
   </p:cSld>
   <p:clrMapOvr>
@@ -12502,7 +12562,7 @@
                 <a:ea typeface="Arial" pitchFamily="34" charset="-122"/>
                 <a:cs typeface="Arial" pitchFamily="34" charset="-120"/>
               </a:rPr>
-              <a:t>naive: INFEASIBLE (250 kb/d un-runnable)</a:t>
+              <a:t>naive: INFEASIBLE — blend breaches Vizag’s sulphur limit</a:t>
             </a:r>
             <a:endParaRPr lang="en-US" sz="1200" dirty="0"/>
           </a:p>
@@ -12544,7 +12604,7 @@
                 <a:ea typeface="Arial" pitchFamily="34" charset="-122"/>
                 <a:cs typeface="Arial" pitchFamily="34" charset="-120"/>
               </a:rPr>
-              <a:t>KARNADHAR: FEASIBLE — $3.15M/day yield protected</a:t>
+              <a:t>KARNADHAR: FEASIBLE — and priced: the reroute ties up +66 VLCC-equivalents (ton-mile)</a:t>
             </a:r>
             <a:endParaRPr lang="en-US" sz="1200" dirty="0"/>
           </a:p>
@@ -12672,7 +12732,7 @@
                 <a:ea typeface="Arial" pitchFamily="34" charset="-122"/>
                 <a:cs typeface="Arial" pitchFamily="34" charset="-120"/>
               </a:rPr>
-              <a:t>even optimal reroute leaves 32 kb/d unmet</a:t>
+              <a:t>alternate suppliers squeezed to 60% of headroom</a:t>
             </a:r>
             <a:endParaRPr lang="en-US" sz="1200" dirty="0"/>
           </a:p>
@@ -12714,7 +12774,7 @@
                 <a:ea typeface="Arial" pitchFamily="34" charset="-122"/>
                 <a:cs typeface="Arial" pitchFamily="34" charset="-120"/>
               </a:rPr>
-              <a:t>engine says so honestly → demand management + SPR draw</a:t>
+              <a:t>still feasible — grade-matching value rises to $1.95M/day of protected yield</a:t>
             </a:r>
             <a:endParaRPr lang="en-US" sz="1200" dirty="0"/>
           </a:p>
@@ -12842,7 +12902,7 @@
                 <a:ea typeface="Arial" pitchFamily="34" charset="-122"/>
                 <a:cs typeface="Arial" pitchFamily="34" charset="-120"/>
               </a:rPr>
-              <a:t>1,590 kb/d of discounted crude vanishes</a:t>
+              <a:t>naive sends 220 kb/d to refineries that cannot run it</a:t>
             </a:r>
             <a:endParaRPr lang="en-US" sz="1200" dirty="0"/>
           </a:p>
@@ -12884,7 +12944,7 @@
                 <a:ea typeface="Arial" pitchFamily="34" charset="-122"/>
                 <a:cs typeface="Arial" pitchFamily="34" charset="-120"/>
               </a:rPr>
-              <a:t>feasible reroute at higher cost — India’s new #1 supplier is replaceable, at a price</a:t>
+              <a:t>usable shortfall 220 → 0 — India’s #1 supplier is replaceable, at a price</a:t>
             </a:r>
             <a:endParaRPr lang="en-US" sz="1200" dirty="0"/>
           </a:p>
@@ -13012,7 +13072,7 @@
                 <a:ea typeface="Arial" pitchFamily="34" charset="-122"/>
                 <a:cs typeface="Arial" pitchFamily="34" charset="-120"/>
               </a:rPr>
-              <a:t>the nightmare: 2 of top 3 suppliers gone</a:t>
+              <a:t>the nightmare: 3,900 kb/d gap, 2 of top 3 suppliers gone</a:t>
             </a:r>
             <a:endParaRPr lang="en-US" sz="1200" dirty="0"/>
           </a:p>
@@ -13054,7 +13114,7 @@
                 <a:ea typeface="Arial" pitchFamily="34" charset="-122"/>
                 <a:cs typeface="Arial" pitchFamily="34" charset="-120"/>
               </a:rPr>
-              <a:t>partial coverage only — quantified shortfall drives rationing policy</a:t>
+              <a:t>honest: 2,166 kb/d unmet, quantified — naive pretends, with 546 kb/d of fake fill</a:t>
             </a:r>
             <a:endParaRPr lang="en-US" sz="1200" dirty="0"/>
           </a:p>

--- a/deliverables/KARNADHAR_Deck.pptx
+++ b/deliverables/KARNADHAR_Deck.pptx
@@ -2855,7 +2855,7 @@
                 <a:ea typeface="Arial" pitchFamily="34" charset="-122"/>
                 <a:cs typeface="Arial" pitchFamily="34" charset="-120"/>
               </a:rPr>
-              <a:t>LP shadow prices, usable shortfall, VLCC ton-mile cost — live on every scenario</a:t>
+              <a:t>shadow prices, VLCC ton-mile, SPR drawdown schedule + executive brief — on every scenario</a:t>
             </a:r>
             <a:endParaRPr lang="en-US" sz="1350" dirty="0"/>
           </a:p>
@@ -3070,7 +3070,7 @@
                 <a:ea typeface="Arial" pitchFamily="34" charset="-122"/>
                 <a:cs typeface="Arial" pitchFamily="34" charset="-120"/>
               </a:rPr>
-              <a:t>45 / 45</a:t>
+              <a:t>50 / 50</a:t>
             </a:r>
             <a:endParaRPr lang="en-US" sz="4400" dirty="0"/>
           </a:p>
@@ -3173,7 +3173,7 @@
                 <a:ea typeface="Arial" pitchFamily="34" charset="-122"/>
                 <a:cs typeface="Arial" pitchFamily="34" charset="-120"/>
               </a:rPr>
-              <a:t>cascade monotonic; bypass nuance; twin-deficit wired</a:t>
+              <a:t>cascade monotonic; bypass nuance; sensitivity band; twin deficit</a:t>
             </a:r>
             <a:endParaRPr lang="en-US" sz="1250" dirty="0"/>
           </a:p>
@@ -3236,7 +3236,7 @@
                 <a:ea typeface="Arial" pitchFamily="34" charset="-122"/>
                 <a:cs typeface="Arial" pitchFamily="34" charset="-120"/>
               </a:rPr>
-              <a:t>engine admits unmet demand under compound shocks</a:t>
+              <a:t>engine admits unmet demand; SPR scheduler holds/bridges/rations</a:t>
             </a:r>
             <a:endParaRPr lang="en-US" sz="1250" dirty="0"/>
           </a:p>
@@ -3278,7 +3278,7 @@
                 <a:ea typeface="Arial" pitchFamily="34" charset="-122"/>
                 <a:cs typeface="Arial" pitchFamily="34" charset="-120"/>
               </a:rPr>
-              <a:t>multi-commodity lens generalises (8 imports, one framework)</a:t>
+              <a:t>multi-commodity lens generalises — Red Sea spares crude, hits edible oils</a:t>
             </a:r>
             <a:endParaRPr lang="en-US" sz="1250" dirty="0"/>
           </a:p>
@@ -13128,8 +13128,8 @@
         </p:nvSpPr>
         <p:spPr>
           <a:xfrm>
-            <a:off x="548640" y="6263640"/>
-            <a:ext cx="11064240" cy="457200"/>
+            <a:off x="548640" y="6217920"/>
+            <a:ext cx="11064240" cy="548640"/>
           </a:xfrm>
           <a:prstGeom prst="rect">
             <a:avLst/>
@@ -13142,10 +13142,13 @@
           <a:lstStyle/>
           <a:p>
             <a:pPr indent="0" marL="0">
-              <a:buNone/>
-            </a:pPr>
-            <a:r>
-              <a:rPr lang="en-US" sz="1250" i="1" dirty="0">
+              <a:lnSpc>
+                <a:spcPts val="1500"/>
+              </a:lnSpc>
+              <a:buNone/>
+            </a:pPr>
+            <a:r>
+              <a:rPr lang="en-US" sz="1200" i="1" dirty="0">
                 <a:solidFill>
                   <a:srgbClr val="5DCAA5"/>
                 </a:solidFill>
@@ -13153,9 +13156,9 @@
                 <a:ea typeface="Arial" pitchFamily="34" charset="-122"/>
                 <a:cs typeface="Arial" pitchFamily="34" charset="-120"/>
               </a:rPr>
-              <a:t>An honest engine: when a shock is too severe to reroute around, KARNADHAR quantifies the gap instead of pretending — because “you must cut demand by X” is the most decision-useful output there is.</a:t>
-            </a:r>
-            <a:endParaRPr lang="en-US" sz="1250" dirty="0"/>
+              <a:t>Also modelled: the brief’s Red Sea suspension — India’s crude barely moves (Cape-routed), but the commodity lens shows who is hit: Black-Sea edible oils (18%). And when a shock is too severe to reroute around, KARNADHAR quantifies the gap — the SPR scheduler answers hold / bridge / ration with a drawdown rate.</a:t>
+            </a:r>
+            <a:endParaRPr lang="en-US" sz="1200" dirty="0"/>
           </a:p>
         </p:txBody>
       </p:sp>

--- a/deliverables/KARNADHAR_Deck.pptx
+++ b/deliverables/KARNADHAR_Deck.pptx
@@ -602,7 +602,7 @@
           <a:p>
             <a:r>
               <a:rPr lang="en-US" dirty="0"/>
-              <a:t>This is the product. Next.js and MapLibre over a FastAPI engine. The globe is live — the red routes are the Gulf corridors dying when Hormuz closes; the green ones are the alternates KARNADHAR is re-routing through. Click a scenario and the entire national plan re-solves in tens of milliseconds, measured live in-app. And under every scenario sits the decision layer: the LP’s shadow prices naming the scarcest barrel, the usable-shortfall honesty metric, and the tanker cost of longer voyages.</a:t>
+              <a:t>This is the product — and the map does not just show status, it shows the ANSWER. The red routes are the Gulf corridors dying when Hormuz closes. The bright animated flows are the optimizer’s plan itself: every allocation drawn from its source, around the Cape where that is the real voyage, into the exact refinery it feeds, width-weighted by barrels per day. Hover any flow and it tells you: Russia to Jamnagar, 658 thousand barrels a day, LP-assigned. Click a scenario and the whole picture re-solves in tens of milliseconds. Under it all: shadow prices, tanker cost, SPR schedule, executive brief.</a:t>
             </a:r>
             <a:endParaRPr lang="en-US" dirty="0"/>
           </a:p>
@@ -2476,7 +2476,7 @@
             <a:avLst/>
           </a:prstGeom>
           <a:solidFill>
-            <a:srgbClr val="5DCAA5"/>
+            <a:srgbClr val="4B96DC"/>
           </a:solidFill>
           <a:ln/>
         </p:spPr>
@@ -2517,7 +2517,7 @@
                 <a:ea typeface="Arial" pitchFamily="34" charset="-122"/>
                 <a:cs typeface="Arial" pitchFamily="34" charset="-120"/>
               </a:rPr>
-              <a:t>Live 3D globe
+              <a:t>Optimizer flows — the plan, drawn
 </a:t>
             </a:r>
             <a:pPr indent="0" marL="0">
@@ -2535,7 +2535,7 @@
                 <a:ea typeface="Arial" pitchFamily="34" charset="-122"/>
                 <a:cs typeface="Arial" pitchFamily="34" charset="-120"/>
               </a:rPr>
-              <a:t>true globe projection with real AIS vessels; refineries sized &amp; coloured by real data</a:t>
+              <a:t>every LP allocation becomes an animated flow: source → corridor → the exact refinery, width = kb/d</a:t>
             </a:r>
             <a:endParaRPr lang="en-US" sz="1350" dirty="0"/>
           </a:p>
@@ -2556,7 +2556,7 @@
             <a:avLst/>
           </a:prstGeom>
           <a:solidFill>
-            <a:srgbClr val="E85A58"/>
+            <a:srgbClr val="5DCAA5"/>
           </a:solidFill>
           <a:ln/>
         </p:spPr>
@@ -2597,7 +2597,7 @@
                 <a:ea typeface="Arial" pitchFamily="34" charset="-122"/>
                 <a:cs typeface="Arial" pitchFamily="34" charset="-120"/>
               </a:rPr>
-              <a:t>Cut vs alive routes
+              <a:t>Live 3D globe / 2D toggle
 </a:t>
             </a:r>
             <a:pPr indent="0" marL="0">
@@ -2615,7 +2615,7 @@
                 <a:ea typeface="Arial" pitchFamily="34" charset="-122"/>
                 <a:cs typeface="Arial" pitchFamily="34" charset="-120"/>
               </a:rPr>
-              <a:t>every supply corridor recolours the instant a scenario changes</a:t>
+              <a:t>true globe projection (or flat map), real AIS vessels, bypass pipelines mapped</a:t>
             </a:r>
             <a:endParaRPr lang="en-US" sz="1350" dirty="0"/>
           </a:p>
@@ -2677,7 +2677,7 @@
                 <a:ea typeface="Arial" pitchFamily="34" charset="-122"/>
                 <a:cs typeface="Arial" pitchFamily="34" charset="-120"/>
               </a:rPr>
-              <a:t>Knowledge-graph view
+              <a:t>Interactive knowledge graph
 </a:t>
             </a:r>
             <a:pPr indent="0" marL="0">
@@ -2695,7 +2695,7 @@
                 <a:ea typeface="Arial" pitchFamily="34" charset="-122"/>
                 <a:cs typeface="Arial" pitchFamily="34" charset="-120"/>
               </a:rPr>
-              <a:t>toggle to the 50-node supplier→strait→refinery graph; threat edges glow per scenario</a:t>
+              <a:t>zoom, pan, drag the 50-node supplier→strait→refinery web; threat edges glow per scenario</a:t>
             </a:r>
             <a:endParaRPr lang="en-US" sz="1350" dirty="0"/>
           </a:p>

--- a/deliverables/KARNADHAR_Deck.pptx
+++ b/deliverables/KARNADHAR_Deck.pptx
@@ -2517,7 +2517,7 @@
                 <a:ea typeface="Arial" pitchFamily="34" charset="-122"/>
                 <a:cs typeface="Arial" pitchFamily="34" charset="-120"/>
               </a:rPr>
-              <a:t>Optimizer flows — the plan, drawn
+              <a:t>Reroute deep-dive — routes ranked #1..N
 </a:t>
             </a:r>
             <a:pPr indent="0" marL="0">
@@ -2535,7 +2535,7 @@
                 <a:ea typeface="Arial" pitchFamily="34" charset="-122"/>
                 <a:cs typeface="Arial" pitchFamily="34" charset="-120"/>
               </a:rPr>
-              <a:t>every LP allocation becomes an animated flow: source → corridor → the exact refinery, width = kb/d</a:t>
+              <a:t>click a disruption: alternative corridors ranked by LP-committed volume, each self-defending; click one to isolate it on the map with its derivation</a:t>
             </a:r>
             <a:endParaRPr lang="en-US" sz="1350" dirty="0"/>
           </a:p>
@@ -2597,7 +2597,7 @@
                 <a:ea typeface="Arial" pitchFamily="34" charset="-122"/>
                 <a:cs typeface="Arial" pitchFamily="34" charset="-120"/>
               </a:rPr>
-              <a:t>Live 3D globe / 2D toggle
+              <a:t>Optimizer flows — the plan, drawn
 </a:t>
             </a:r>
             <a:pPr indent="0" marL="0">
@@ -2615,7 +2615,7 @@
                 <a:ea typeface="Arial" pitchFamily="34" charset="-122"/>
                 <a:cs typeface="Arial" pitchFamily="34" charset="-120"/>
               </a:rPr>
-              <a:t>true globe projection (or flat map), real AIS vessels, bypass pipelines mapped</a:t>
+              <a:t>every LP allocation becomes an animated arc: source → corridor → the exact refinery, width = kb/d</a:t>
             </a:r>
             <a:endParaRPr lang="en-US" sz="1350" dirty="0"/>
           </a:p>
@@ -2677,7 +2677,7 @@
                 <a:ea typeface="Arial" pitchFamily="34" charset="-122"/>
                 <a:cs typeface="Arial" pitchFamily="34" charset="-120"/>
               </a:rPr>
-              <a:t>Interactive knowledge graph
+              <a:t>3D globe / 2D toggle · interactive KG
 </a:t>
             </a:r>
             <a:pPr indent="0" marL="0">
@@ -2695,7 +2695,7 @@
                 <a:ea typeface="Arial" pitchFamily="34" charset="-122"/>
                 <a:cs typeface="Arial" pitchFamily="34" charset="-120"/>
               </a:rPr>
-              <a:t>zoom, pan, drag the 50-node supplier→strait→refinery web; threat edges glow per scenario</a:t>
+              <a:t>globe or flat map, real AIS vessels, bypass pipelines; zoom/pan/drag the 50-node supplier→strait→refinery graph</a:t>
             </a:r>
             <a:endParaRPr lang="en-US" sz="1350" dirty="0"/>
           </a:p>
@@ -3070,7 +3070,7 @@
                 <a:ea typeface="Arial" pitchFamily="34" charset="-122"/>
                 <a:cs typeface="Arial" pitchFamily="34" charset="-120"/>
               </a:rPr>
-              <a:t>50 / 50</a:t>
+              <a:t>57 / 57</a:t>
             </a:r>
             <a:endParaRPr lang="en-US" sz="4400" dirty="0"/>
           </a:p>
@@ -3258,6 +3258,27 @@
                 <a:cs typeface="Arial" pitchFamily="34" charset="-120"/>
               </a:rPr>
               <a:t>decision layer proven: shadow prices · VLCC ton-mile · usable shortfall</a:t>
+            </a:r>
+            <a:endParaRPr lang="en-US" sz="1250" dirty="0"/>
+          </a:p>
+          <a:p>
+            <a:pPr marL="342900" indent="-342900">
+              <a:spcAft>
+                <a:spcPts val="800"/>
+              </a:spcAft>
+              <a:buSzPct val="100000"/>
+              <a:buChar char="✓"/>
+            </a:pPr>
+            <a:r>
+              <a:rPr lang="en-US" sz="1250" dirty="0">
+                <a:solidFill>
+                  <a:srgbClr val="93A0B0"/>
+                </a:solidFill>
+                <a:latin typeface="Arial" pitchFamily="34" charset="0"/>
+                <a:ea typeface="Arial" pitchFamily="34" charset="-122"/>
+                <a:cs typeface="Arial" pitchFamily="34" charset="-120"/>
+              </a:rPr>
+              <a:t>reroute routes ranked by LP-committed volume — not the scarcity-artifact trap</a:t>
             </a:r>
             <a:endParaRPr lang="en-US" sz="1250" dirty="0"/>
           </a:p>

--- a/deliverables/KARNADHAR_Deck.pptx
+++ b/deliverables/KARNADHAR_Deck.pptx
@@ -1482,7 +1482,7 @@
           <a:p>
             <a:r>
               <a:rPr lang="en-US" dirty="0"/>
-              <a:t>The brief demands explicit, testable assumptions — so our cascade is a glass box. Notice the flat segment: a 25% closure is absorbed by the Saudi and UAE bypass pipelines — the model knows that nuance. At full closure: Brent 190, petrol above 125 rupees, and the number that matters most — the current-account deficit exploding past 6% of GDP. India can’t sustain that dollar outflow. That’s why speed of response is a national-security variable.</a:t>
+              <a:t>The brief demands explicit, testable assumptions — so our cascade is a glass box. Notice the flat segment: a 25% closure is absorbed by the Saudi and UAE bypass pipelines — the model knows that nuance. At full closure: Brent 190, petrol above 125 rupees, and the number that matters most — the current-account deficit going from 0.7 percent to past 6 percent of GDP. And crucially, we do NOT use this global-shock model for every scenario. A Russia sanction is not a supply shock — those barrels redistribute to China — so global Brent barely moves; India’s real cost is the roughly 3.5 billion dollars a year of Urals discount it can no longer capture. Getting that channel distinction right is exactly what separates a real energy model from a dashboard. India can’t sustain the dollar outflow — which is why speed of response is a national-security variable.</a:t>
             </a:r>
             <a:endParaRPr lang="en-US" dirty="0"/>
           </a:p>
@@ -3070,7 +3070,7 @@
                 <a:ea typeface="Arial" pitchFamily="34" charset="-122"/>
                 <a:cs typeface="Arial" pitchFamily="34" charset="-120"/>
               </a:rPr>
-              <a:t>57 / 57</a:t>
+              <a:t>62 / 62</a:t>
             </a:r>
             <a:endParaRPr lang="en-US" sz="4400" dirty="0"/>
           </a:p>
@@ -3101,7 +3101,7 @@
               <a:buNone/>
             </a:pPr>
             <a:r>
-              <a:rPr lang="en-US" sz="1200" dirty="0">
+              <a:rPr lang="en-US" sz="1150" dirty="0">
                 <a:solidFill>
                   <a:srgbClr val="93A0B0"/>
                 </a:solidFill>
@@ -3109,9 +3109,9 @@
                 <a:ea typeface="Arial" pitchFamily="34" charset="-122"/>
                 <a:cs typeface="Arial" pitchFamily="34" charset="-120"/>
               </a:rPr>
-              <a:t>checks passed — one command, exit-code gated, run in CI on every push</a:t>
-            </a:r>
-            <a:endParaRPr lang="en-US" sz="1200" dirty="0"/>
+              <a:t>checks passed — one command, exit-code gated, run in CI</a:t>
+            </a:r>
+            <a:endParaRPr lang="en-US" sz="1150" dirty="0"/>
           </a:p>
         </p:txBody>
       </p:sp>
@@ -5539,7 +5539,7 @@
                 <a:ea typeface="Arial" pitchFamily="34" charset="-122"/>
                 <a:cs typeface="Arial" pitchFamily="34" charset="-120"/>
               </a:rPr>
-              <a:t>India is a twin-deficit economy. A sustained price shock adds ~$190 bn/yr to the import bill, blowing the current-account deficit from 1.2% to over 6% of GDP. Unlike trade-surplus Japan or Korea, India cannot sustain that dollar outflow — which is why unprepared economies take </a:t>
+              <a:t>India is a twin-deficit economy. A sustained price shock adds ~$190 bn/yr to the import bill, blowing the current-account deficit from 0.7% (FY24) to over 6% of GDP. Unlike trade-surplus Japan or Korea, India cannot sustain that dollar outflow — which is why unprepared economies take </a:t>
             </a:r>
             <a:pPr indent="0" marL="0">
               <a:lnSpc>
@@ -12225,7 +12225,7 @@
                 <a:ea typeface="Arial" pitchFamily="34" charset="-122"/>
                 <a:cs typeface="Arial" pitchFamily="34" charset="-120"/>
               </a:rPr>
-              <a:t>1.2% → 6.1%</a:t>
+              <a:t>0.7% → 6.1%</a:t>
             </a:r>
             <a:endParaRPr lang="en-US" sz="2000" dirty="0"/>
           </a:p>

--- a/deliverables/KARNADHAR_Deck.pptx
+++ b/deliverables/KARNADHAR_Deck.pptx
@@ -3084,7 +3084,7 @@
         </p:nvSpPr>
         <p:spPr>
           <a:xfrm>
-            <a:off x="822960" y="2926080"/>
+            <a:off x="822960" y="2907792"/>
             <a:ext cx="4846320" cy="274320"/>
           </a:xfrm>
           <a:prstGeom prst="rect">
@@ -3101,7 +3101,7 @@
               <a:buNone/>
             </a:pPr>
             <a:r>
-              <a:rPr lang="en-US" sz="1150" dirty="0">
+              <a:rPr lang="en-US" sz="1100" dirty="0">
                 <a:solidFill>
                   <a:srgbClr val="93A0B0"/>
                 </a:solidFill>
@@ -3111,7 +3111,7 @@
               </a:rPr>
               <a:t>checks passed — one command, exit-code gated, run in CI</a:t>
             </a:r>
-            <a:endParaRPr lang="en-US" sz="1150" dirty="0"/>
+            <a:endParaRPr lang="en-US" sz="1100" dirty="0"/>
           </a:p>
         </p:txBody>
       </p:sp>
@@ -3123,28 +3123,28 @@
         </p:nvSpPr>
         <p:spPr>
           <a:xfrm>
-            <a:off x="868680" y="3291840"/>
-            <a:ext cx="4892040" cy="2468880"/>
-          </a:xfrm>
-          <a:prstGeom prst="rect">
-            <a:avLst/>
-          </a:prstGeom>
-          <a:noFill/>
-          <a:ln/>
-        </p:spPr>
-        <p:txBody>
-          <a:bodyPr wrap="square" lIns="0" tIns="0" rIns="0" bIns="0" rtlCol="0" anchor="ctr"/>
+            <a:off x="868680" y="3310128"/>
+            <a:ext cx="4892040" cy="2514600"/>
+          </a:xfrm>
+          <a:prstGeom prst="rect">
+            <a:avLst/>
+          </a:prstGeom>
+          <a:noFill/>
+          <a:ln/>
+        </p:spPr>
+        <p:txBody>
+          <a:bodyPr wrap="square" lIns="0" tIns="0" rIns="0" bIns="0" rtlCol="0" anchor="t"/>
           <a:lstStyle/>
           <a:p>
             <a:pPr marL="342900" indent="-342900">
               <a:spcAft>
-                <a:spcPts val="800"/>
+                <a:spcPts val="900"/>
               </a:spcAft>
               <a:buSzPct val="100000"/>
               <a:buChar char="✓"/>
             </a:pPr>
             <a:r>
-              <a:rPr lang="en-US" sz="1250" dirty="0">
+              <a:rPr lang="en-US" sz="1200" dirty="0">
                 <a:solidFill>
                   <a:srgbClr val="93A0B0"/>
                 </a:solidFill>
@@ -3152,20 +3152,20 @@
                 <a:ea typeface="Arial" pitchFamily="34" charset="-122"/>
                 <a:cs typeface="Arial" pitchFamily="34" charset="-120"/>
               </a:rPr>
-              <a:t>wedge holds: naive infeasible for grade reasons, LP optimal</a:t>
-            </a:r>
-            <a:endParaRPr lang="en-US" sz="1250" dirty="0"/>
+              <a:t>the wedge holds: naive infeasible for grade reasons; LP optimal</a:t>
+            </a:r>
+            <a:endParaRPr lang="en-US" sz="1200" dirty="0"/>
           </a:p>
           <a:p>
             <a:pPr marL="342900" indent="-342900">
               <a:spcAft>
-                <a:spcPts val="800"/>
+                <a:spcPts val="900"/>
               </a:spcAft>
               <a:buSzPct val="100000"/>
               <a:buChar char="✓"/>
             </a:pPr>
             <a:r>
-              <a:rPr lang="en-US" sz="1250" dirty="0">
+              <a:rPr lang="en-US" sz="1200" dirty="0">
                 <a:solidFill>
                   <a:srgbClr val="93A0B0"/>
                 </a:solidFill>
@@ -3173,20 +3173,20 @@
                 <a:ea typeface="Arial" pitchFamily="34" charset="-122"/>
                 <a:cs typeface="Arial" pitchFamily="34" charset="-120"/>
               </a:rPr>
-              <a:t>cascade monotonic; bypass nuance; sensitivity band; twin deficit</a:t>
-            </a:r>
-            <a:endParaRPr lang="en-US" sz="1250" dirty="0"/>
+              <a:t>cascade monotonic + sanction ≠ global shock (discount-loss channel)</a:t>
+            </a:r>
+            <a:endParaRPr lang="en-US" sz="1200" dirty="0"/>
           </a:p>
           <a:p>
             <a:pPr marL="342900" indent="-342900">
               <a:spcAft>
-                <a:spcPts val="800"/>
+                <a:spcPts val="900"/>
               </a:spcAft>
               <a:buSzPct val="100000"/>
               <a:buChar char="✓"/>
             </a:pPr>
             <a:r>
-              <a:rPr lang="en-US" sz="1250" dirty="0">
+              <a:rPr lang="en-US" sz="1200" dirty="0">
                 <a:solidFill>
                   <a:srgbClr val="93A0B0"/>
                 </a:solidFill>
@@ -3194,20 +3194,20 @@
                 <a:ea typeface="Arial" pitchFamily="34" charset="-122"/>
                 <a:cs typeface="Arial" pitchFamily="34" charset="-120"/>
               </a:rPr>
-              <a:t>signal alert precedes market repricing on real data</a:t>
-            </a:r>
-            <a:endParaRPr lang="en-US" sz="1250" dirty="0"/>
+              <a:t>signal alert precedes market repricing on the real 2025 data</a:t>
+            </a:r>
+            <a:endParaRPr lang="en-US" sz="1200" dirty="0"/>
           </a:p>
           <a:p>
             <a:pPr marL="342900" indent="-342900">
               <a:spcAft>
-                <a:spcPts val="800"/>
+                <a:spcPts val="900"/>
               </a:spcAft>
               <a:buSzPct val="100000"/>
               <a:buChar char="✓"/>
             </a:pPr>
             <a:r>
-              <a:rPr lang="en-US" sz="1250" dirty="0">
+              <a:rPr lang="en-US" sz="1200" dirty="0">
                 <a:solidFill>
                   <a:srgbClr val="93A0B0"/>
                 </a:solidFill>
@@ -3215,20 +3215,20 @@
                 <a:ea typeface="Arial" pitchFamily="34" charset="-122"/>
                 <a:cs typeface="Arial" pitchFamily="34" charset="-120"/>
               </a:rPr>
-              <a:t>real-diet integrity: 46% exposure, configs sane</a:t>
-            </a:r>
-            <a:endParaRPr lang="en-US" sz="1250" dirty="0"/>
+              <a:t>reroute ranked by LP-committed volume — no scarcity-artifact trap</a:t>
+            </a:r>
+            <a:endParaRPr lang="en-US" sz="1200" dirty="0"/>
           </a:p>
           <a:p>
             <a:pPr marL="342900" indent="-342900">
               <a:spcAft>
-                <a:spcPts val="800"/>
+                <a:spcPts val="900"/>
               </a:spcAft>
               <a:buSzPct val="100000"/>
               <a:buChar char="✓"/>
             </a:pPr>
             <a:r>
-              <a:rPr lang="en-US" sz="1250" dirty="0">
+              <a:rPr lang="en-US" sz="1200" dirty="0">
                 <a:solidFill>
                   <a:srgbClr val="93A0B0"/>
                 </a:solidFill>
@@ -3236,20 +3236,20 @@
                 <a:ea typeface="Arial" pitchFamily="34" charset="-122"/>
                 <a:cs typeface="Arial" pitchFamily="34" charset="-120"/>
               </a:rPr>
-              <a:t>engine admits unmet demand; SPR scheduler holds/bridges/rations</a:t>
-            </a:r>
-            <a:endParaRPr lang="en-US" sz="1250" dirty="0"/>
+              <a:t>decision layer: shadow prices · VLCC ton-mile · SPR scheduler</a:t>
+            </a:r>
+            <a:endParaRPr lang="en-US" sz="1200" dirty="0"/>
           </a:p>
           <a:p>
             <a:pPr marL="342900" indent="-342900">
               <a:spcAft>
-                <a:spcPts val="800"/>
+                <a:spcPts val="900"/>
               </a:spcAft>
               <a:buSzPct val="100000"/>
               <a:buChar char="✓"/>
             </a:pPr>
             <a:r>
-              <a:rPr lang="en-US" sz="1250" dirty="0">
+              <a:rPr lang="en-US" sz="1200" dirty="0">
                 <a:solidFill>
                   <a:srgbClr val="93A0B0"/>
                 </a:solidFill>
@@ -3257,51 +3257,9 @@
                 <a:ea typeface="Arial" pitchFamily="34" charset="-122"/>
                 <a:cs typeface="Arial" pitchFamily="34" charset="-120"/>
               </a:rPr>
-              <a:t>decision layer proven: shadow prices · VLCC ton-mile · usable shortfall</a:t>
-            </a:r>
-            <a:endParaRPr lang="en-US" sz="1250" dirty="0"/>
-          </a:p>
-          <a:p>
-            <a:pPr marL="342900" indent="-342900">
-              <a:spcAft>
-                <a:spcPts val="800"/>
-              </a:spcAft>
-              <a:buSzPct val="100000"/>
-              <a:buChar char="✓"/>
-            </a:pPr>
-            <a:r>
-              <a:rPr lang="en-US" sz="1250" dirty="0">
-                <a:solidFill>
-                  <a:srgbClr val="93A0B0"/>
-                </a:solidFill>
-                <a:latin typeface="Arial" pitchFamily="34" charset="0"/>
-                <a:ea typeface="Arial" pitchFamily="34" charset="-122"/>
-                <a:cs typeface="Arial" pitchFamily="34" charset="-120"/>
-              </a:rPr>
-              <a:t>reroute routes ranked by LP-committed volume — not the scarcity-artifact trap</a:t>
-            </a:r>
-            <a:endParaRPr lang="en-US" sz="1250" dirty="0"/>
-          </a:p>
-          <a:p>
-            <a:pPr marL="342900" indent="-342900">
-              <a:spcAft>
-                <a:spcPts val="800"/>
-              </a:spcAft>
-              <a:buSzPct val="100000"/>
-              <a:buChar char="✓"/>
-            </a:pPr>
-            <a:r>
-              <a:rPr lang="en-US" sz="1250" dirty="0">
-                <a:solidFill>
-                  <a:srgbClr val="93A0B0"/>
-                </a:solidFill>
-                <a:latin typeface="Arial" pitchFamily="34" charset="0"/>
-                <a:ea typeface="Arial" pitchFamily="34" charset="-122"/>
-                <a:cs typeface="Arial" pitchFamily="34" charset="-120"/>
-              </a:rPr>
-              <a:t>multi-commodity lens generalises — Red Sea spares crude, hits edible oils</a:t>
-            </a:r>
-            <a:endParaRPr lang="en-US" sz="1250" dirty="0"/>
+              <a:t>multi-commodity generalises — Red Sea spares crude, hits edible oils</a:t>
+            </a:r>
+            <a:endParaRPr lang="en-US" sz="1200" dirty="0"/>
           </a:p>
         </p:txBody>
       </p:sp>
@@ -4681,8 +4639,8 @@
         </p:nvSpPr>
         <p:spPr>
           <a:xfrm>
-            <a:off x="640080" y="548640"/>
-            <a:ext cx="5486400" cy="274320"/>
+            <a:off x="640080" y="2468880"/>
+            <a:ext cx="10881360" cy="548640"/>
           </a:xfrm>
           <a:prstGeom prst="rect">
             <a:avLst/>
@@ -4698,7 +4656,46 @@
               <a:buNone/>
             </a:pPr>
             <a:r>
-              <a:rPr lang="en-US" sz="1200" b="1" spc="300" kern="0" dirty="0">
+              <a:rPr lang="en-US" sz="2700" b="1" dirty="0">
+                <a:solidFill>
+                  <a:srgbClr val="E8EDF2"/>
+                </a:solidFill>
+                <a:latin typeface="Arial" pitchFamily="34" charset="0"/>
+                <a:ea typeface="Arial" pitchFamily="34" charset="-122"/>
+                <a:cs typeface="Arial" pitchFamily="34" charset="-120"/>
+              </a:rPr>
+              <a:t>India’s energy lifeline has no helmsman for the storm.</a:t>
+            </a:r>
+            <a:endParaRPr lang="en-US" sz="2700" dirty="0"/>
+          </a:p>
+        </p:txBody>
+      </p:sp>
+      <p:sp>
+        <p:nvSpPr>
+          <p:cNvPr id="5" name="Text 2"/>
+          <p:cNvSpPr/>
+          <p:nvPr/>
+        </p:nvSpPr>
+        <p:spPr>
+          <a:xfrm>
+            <a:off x="640080" y="3063240"/>
+            <a:ext cx="10881360" cy="868680"/>
+          </a:xfrm>
+          <a:prstGeom prst="rect">
+            <a:avLst/>
+          </a:prstGeom>
+          <a:noFill/>
+          <a:ln/>
+        </p:spPr>
+        <p:txBody>
+          <a:bodyPr wrap="square" lIns="0" tIns="0" rIns="0" bIns="0" rtlCol="0" anchor="ctr"/>
+          <a:lstStyle/>
+          <a:p>
+            <a:pPr indent="0" marL="0">
+              <a:buNone/>
+            </a:pPr>
+            <a:r>
+              <a:rPr lang="en-US" sz="4600" b="1" dirty="0">
                 <a:solidFill>
                   <a:srgbClr val="5DCAA5"/>
                 </a:solidFill>
@@ -4706,22 +4703,22 @@
                 <a:ea typeface="Arial" pitchFamily="34" charset="-122"/>
                 <a:cs typeface="Arial" pitchFamily="34" charset="-120"/>
               </a:rPr>
-              <a:t>NEXT 90 DAYS</a:t>
-            </a:r>
-            <a:endParaRPr lang="en-US" sz="1200" dirty="0"/>
-          </a:p>
-        </p:txBody>
-      </p:sp>
-      <p:sp>
-        <p:nvSpPr>
-          <p:cNvPr id="5" name="Text 2"/>
-          <p:cNvSpPr/>
-          <p:nvPr/>
-        </p:nvSpPr>
-        <p:spPr>
-          <a:xfrm>
-            <a:off x="640080" y="914400"/>
-            <a:ext cx="7772400" cy="1371600"/>
+              <a:t>Now it does.</a:t>
+            </a:r>
+            <a:endParaRPr lang="en-US" sz="4600" dirty="0"/>
+          </a:p>
+        </p:txBody>
+      </p:sp>
+      <p:sp>
+        <p:nvSpPr>
+          <p:cNvPr id="6" name="Text 3"/>
+          <p:cNvSpPr/>
+          <p:nvPr/>
+        </p:nvSpPr>
+        <p:spPr>
+          <a:xfrm>
+            <a:off x="640080" y="4114800"/>
+            <a:ext cx="10881360" cy="365760"/>
           </a:xfrm>
           <a:prstGeom prst="rect">
             <a:avLst/>
@@ -4733,151 +4730,27 @@
           <a:bodyPr wrap="square" lIns="0" tIns="0" rIns="0" bIns="0" rtlCol="0" anchor="ctr"/>
           <a:lstStyle/>
           <a:p>
-            <a:pPr marL="342900" indent="-342900">
-              <a:spcAft>
-                <a:spcPts val="800"/>
-              </a:spcAft>
-              <a:buSzPct val="100000"/>
-              <a:buChar char="→"/>
+            <a:pPr indent="0" marL="0">
+              <a:buNone/>
             </a:pPr>
             <a:r>
               <a:rPr lang="en-US" sz="1400" dirty="0">
                 <a:solidFill>
-                  <a:srgbClr val="E8EDF2"/>
-                </a:solidFill>
-                <a:latin typeface="Arial" pitchFamily="34" charset="0"/>
-                <a:ea typeface="Arial" pitchFamily="34" charset="-122"/>
-                <a:cs typeface="Arial" pitchFamily="34" charset="-120"/>
-              </a:rPr>
-              <a:t>Refinery configs calibrated with Prof. Bhui’s written inputs (in progress)</a:t>
+                  <a:srgbClr val="93A0B0"/>
+                </a:solidFill>
+                <a:latin typeface="Arial" pitchFamily="34" charset="0"/>
+                <a:ea typeface="Arial" pitchFamily="34" charset="-122"/>
+                <a:cs typeface="Arial" pitchFamily="34" charset="-120"/>
+              </a:rPr>
+              <a:t>Real government data · a real optimizer · two domain experts · 62 green checks — running today.</a:t>
             </a:r>
             <a:endParaRPr lang="en-US" sz="1400" dirty="0"/>
           </a:p>
-          <a:p>
-            <a:pPr marL="342900" indent="-342900">
-              <a:spcAft>
-                <a:spcPts val="800"/>
-              </a:spcAft>
-              <a:buSzPct val="100000"/>
-              <a:buChar char="→"/>
-            </a:pPr>
-            <a:r>
-              <a:rPr lang="en-US" sz="1400" dirty="0">
-                <a:solidFill>
-                  <a:srgbClr val="E8EDF2"/>
-                </a:solidFill>
-                <a:latin typeface="Arial" pitchFamily="34" charset="0"/>
-                <a:ea typeface="Arial" pitchFamily="34" charset="-122"/>
-                <a:cs typeface="Arial" pitchFamily="34" charset="-120"/>
-              </a:rPr>
-              <a:t>Commercial AIS feed for dense Gulf coverage; Claude-authored live briefs</a:t>
-            </a:r>
-            <a:endParaRPr lang="en-US" sz="1400" dirty="0"/>
-          </a:p>
-          <a:p>
-            <a:pPr marL="342900" indent="-342900">
-              <a:spcAft>
-                <a:spcPts val="800"/>
-              </a:spcAft>
-              <a:buSzPct val="100000"/>
-              <a:buChar char="→"/>
-            </a:pPr>
-            <a:r>
-              <a:rPr lang="en-US" sz="1400" dirty="0">
-                <a:solidFill>
-                  <a:srgbClr val="E8EDF2"/>
-                </a:solidFill>
-                <a:latin typeface="Arial" pitchFamily="34" charset="0"/>
-                <a:ea typeface="Arial" pitchFamily="34" charset="-122"/>
-                <a:cs typeface="Arial" pitchFamily="34" charset="-120"/>
-              </a:rPr>
-              <a:t>Pilot conversations: PPAC · ISPRL — the analysis they do in days, in 45 ms</a:t>
-            </a:r>
-            <a:endParaRPr lang="en-US" sz="1400" dirty="0"/>
-          </a:p>
-        </p:txBody>
-      </p:sp>
-      <p:sp>
-        <p:nvSpPr>
-          <p:cNvPr id="6" name="Text 3"/>
-          <p:cNvSpPr/>
-          <p:nvPr/>
-        </p:nvSpPr>
-        <p:spPr>
-          <a:xfrm>
-            <a:off x="640080" y="3108960"/>
-            <a:ext cx="10881360" cy="548640"/>
-          </a:xfrm>
-          <a:prstGeom prst="rect">
-            <a:avLst/>
-          </a:prstGeom>
-          <a:noFill/>
-          <a:ln/>
-        </p:spPr>
-        <p:txBody>
-          <a:bodyPr wrap="square" lIns="0" tIns="0" rIns="0" bIns="0" rtlCol="0" anchor="ctr"/>
-          <a:lstStyle/>
-          <a:p>
-            <a:pPr indent="0" marL="0">
-              <a:buNone/>
-            </a:pPr>
-            <a:r>
-              <a:rPr lang="en-US" sz="2600" b="1" dirty="0">
-                <a:solidFill>
-                  <a:srgbClr val="E8EDF2"/>
-                </a:solidFill>
-                <a:latin typeface="Arial" pitchFamily="34" charset="0"/>
-                <a:ea typeface="Arial" pitchFamily="34" charset="-122"/>
-                <a:cs typeface="Arial" pitchFamily="34" charset="-120"/>
-              </a:rPr>
-              <a:t>India’s energy lifeline has no helmsman for the storm.</a:t>
-            </a:r>
-            <a:endParaRPr lang="en-US" sz="2600" dirty="0"/>
-          </a:p>
         </p:txBody>
       </p:sp>
       <p:sp>
         <p:nvSpPr>
           <p:cNvPr id="7" name="Text 4"/>
-          <p:cNvSpPr/>
-          <p:nvPr/>
-        </p:nvSpPr>
-        <p:spPr>
-          <a:xfrm>
-            <a:off x="640080" y="3703320"/>
-            <a:ext cx="10881360" cy="822960"/>
-          </a:xfrm>
-          <a:prstGeom prst="rect">
-            <a:avLst/>
-          </a:prstGeom>
-          <a:noFill/>
-          <a:ln/>
-        </p:spPr>
-        <p:txBody>
-          <a:bodyPr wrap="square" lIns="0" tIns="0" rIns="0" bIns="0" rtlCol="0" anchor="ctr"/>
-          <a:lstStyle/>
-          <a:p>
-            <a:pPr indent="0" marL="0">
-              <a:buNone/>
-            </a:pPr>
-            <a:r>
-              <a:rPr lang="en-US" sz="4400" b="1" dirty="0">
-                <a:solidFill>
-                  <a:srgbClr val="5DCAA5"/>
-                </a:solidFill>
-                <a:latin typeface="Arial" pitchFamily="34" charset="0"/>
-                <a:ea typeface="Arial" pitchFamily="34" charset="-122"/>
-                <a:cs typeface="Arial" pitchFamily="34" charset="-120"/>
-              </a:rPr>
-              <a:t>Now it does.</a:t>
-            </a:r>
-            <a:endParaRPr lang="en-US" sz="4400" dirty="0"/>
-          </a:p>
-        </p:txBody>
-      </p:sp>
-      <p:sp>
-        <p:nvSpPr>
-          <p:cNvPr id="8" name="Text 5"/>
           <p:cNvSpPr/>
           <p:nvPr/>
         </p:nvSpPr>
@@ -10540,7 +10413,7 @@
                 <a:ea typeface="Arial" pitchFamily="34" charset="-122"/>
                 <a:cs typeface="Arial" pitchFamily="34" charset="-120"/>
               </a:rPr>
-              <a:t>THE RESULT THAT MATTERS</a:t>
+              <a:t>EVALUATION FOCUS 2 · PROCUREMENT EXECUTABILITY</a:t>
             </a:r>
             <a:endParaRPr lang="en-US" sz="1200" dirty="0"/>
           </a:p>

--- a/deliverables/KARNADHAR_Deck.pptx
+++ b/deliverables/KARNADHAR_Deck.pptx
@@ -4756,7 +4756,74 @@
         </p:nvSpPr>
         <p:spPr>
           <a:xfrm>
-            <a:off x="640080" y="5989320"/>
+            <a:off x="640080" y="5623560"/>
+            <a:ext cx="10881360" cy="320040"/>
+          </a:xfrm>
+          <a:prstGeom prst="rect">
+            <a:avLst/>
+          </a:prstGeom>
+          <a:noFill/>
+          <a:ln/>
+        </p:spPr>
+        <p:txBody>
+          <a:bodyPr wrap="square" lIns="0" tIns="0" rIns="0" bIns="0" rtlCol="0" anchor="ctr"/>
+          <a:lstStyle/>
+          <a:p>
+            <a:pPr indent="0" marL="0">
+              <a:buNone/>
+            </a:pPr>
+            <a:r>
+              <a:rPr lang="en-US" sz="1300" dirty="0">
+                <a:solidFill>
+                  <a:srgbClr val="93A0B0"/>
+                </a:solidFill>
+                <a:latin typeface="Arial" pitchFamily="34" charset="0"/>
+                <a:ea typeface="Arial" pitchFamily="34" charset="-122"/>
+                <a:cs typeface="Arial" pitchFamily="34" charset="-120"/>
+              </a:rPr>
+              <a:t>Live: </a:t>
+            </a:r>
+            <a:pPr indent="0" marL="0">
+              <a:buNone/>
+            </a:pPr>
+            <a:r>
+              <a:rPr lang="en-US" sz="1300" b="1" dirty="0">
+                <a:solidFill>
+                  <a:srgbClr val="5DCAA5"/>
+                </a:solidFill>
+                <a:latin typeface="Arial" pitchFamily="34" charset="0"/>
+                <a:ea typeface="Arial" pitchFamily="34" charset="-122"/>
+                <a:cs typeface="Arial" pitchFamily="34" charset="-120"/>
+              </a:rPr>
+              <a:t>karnadhar-117722238113.asia-south1.run.app</a:t>
+            </a:r>
+            <a:pPr indent="0" marL="0">
+              <a:buNone/>
+            </a:pPr>
+            <a:r>
+              <a:rPr lang="en-US" sz="1300" dirty="0">
+                <a:solidFill>
+                  <a:srgbClr val="93A0B0"/>
+                </a:solidFill>
+                <a:latin typeface="Arial" pitchFamily="34" charset="0"/>
+                <a:ea typeface="Arial" pitchFamily="34" charset="-122"/>
+                <a:cs typeface="Arial" pitchFamily="34" charset="-120"/>
+              </a:rPr>
+              <a:t>   ·   github.com/PureGenius369/Karnadhar</a:t>
+            </a:r>
+            <a:endParaRPr lang="en-US" sz="1300" dirty="0"/>
+          </a:p>
+        </p:txBody>
+      </p:sp>
+      <p:sp>
+        <p:nvSpPr>
+          <p:cNvPr id="8" name="Text 5"/>
+          <p:cNvSpPr/>
+          <p:nvPr/>
+        </p:nvSpPr>
+        <p:spPr>
+          <a:xfrm>
+            <a:off x="640080" y="6035040"/>
             <a:ext cx="10881360" cy="365760"/>
           </a:xfrm>
           <a:prstGeom prst="rect">
